--- a/docs/pptx/carbo/ritu-carbo-adjcif-death.pptx
+++ b/docs/pptx/carbo/ritu-carbo-adjcif-death.pptx
@@ -4055,7 +4055,7 @@
           <p:spPr>
             <a:xfrm>
               <a:off x="972874" y="1896563"/>
-              <a:ext cx="4513752" cy="91165"/>
+              <a:ext cx="4584344" cy="91165"/>
             </a:xfrm>
             <a:prstGeom prst="rect">
               <a:avLst/>
@@ -4087,7 +4087,7 @@
                   <a:latin typeface="Helvetica"/>
                   <a:cs typeface="Helvetica"/>
                 </a:rPr>
-                <a:t>Discrep &gt;= +25 vs &lt;+25: HR = 32415.88 (95% CI 0.00-Inf), p = 1.000   (Cox PH)</a:t>
+                <a:t>Discrep &gt;= +25 vs &lt;+25: HR = 789643.51 (95% CI 0.00-Inf), p = 1.000   (Cox PH)</a:t>
               </a:r>
             </a:p>
           </p:txBody>
